--- a/test_output/backend_integration_test.pptx
+++ b/test_output/backend_integration_test.pptx
@@ -114,6 +114,128 @@
     </a:lvl9pPr>
   </p:defaultTextStyle>
 </p:presentation>
+</file>
+
+<file path=ppt/charts/chart1.xml><?xml version="1.0" encoding="utf-8"?>
+<c:chartSpace xmlns:c="http://schemas.openxmlformats.org/drawingml/2006/chart" xmlns:a="http://schemas.openxmlformats.org/drawingml/2006/main" xmlns:r="http://schemas.openxmlformats.org/officeDocument/2006/relationships">
+  <c:date1904 val="0"/>
+  <c:chart>
+    <c:title>
+      <c:tx>
+        <c:rich>
+          <a:bodyPr/>
+          <a:lstStyle/>
+          <a:p>
+            <a:pPr>
+              <a:defRPr sz="2800" b="1">
+                <a:solidFill>
+                  <a:srgbClr val="004F9E"/>
+                </a:solidFill>
+                <a:latin typeface="Segoe UI"/>
+              </a:defRPr>
+            </a:pPr>
+            <a:r>
+              <a:t>Performance Comparison</a:t>
+            </a:r>
+          </a:p>
+        </c:rich>
+      </c:tx>
+      <c:layout/>
+      <c:overlay val="0"/>
+    </c:title>
+    <c:autoTitleDeleted val="0"/>
+    <c:plotArea>
+      <c:barChart>
+        <c:barDir val="col"/>
+        <c:grouping val="clustered"/>
+        <c:axId val="-2068027336"/>
+        <c:axId val="-2113994440"/>
+      </c:barChart>
+      <c:catAx>
+        <c:axId val="-2068027336"/>
+        <c:scaling>
+          <c:orientation val="minMax"/>
+        </c:scaling>
+        <c:delete val="0"/>
+        <c:axPos val="b"/>
+        <c:majorTickMark val="out"/>
+        <c:minorTickMark val="none"/>
+        <c:tickLblPos val="nextTo"/>
+        <c:txPr>
+          <a:bodyPr/>
+          <a:lstStyle/>
+          <a:p>
+            <a:pPr>
+              <a:defRPr sz="1100">
+                <a:solidFill>
+                  <a:srgbClr val="6C757D"/>
+                </a:solidFill>
+                <a:latin typeface="Segoe UI"/>
+              </a:defRPr>
+            </a:pPr>
+          </a:p>
+        </c:txPr>
+        <c:crossAx val="-2113994440"/>
+        <c:crosses val="autoZero"/>
+        <c:auto val="1"/>
+        <c:lblAlgn val="ctr"/>
+        <c:lblOffset val="100"/>
+        <c:noMultiLvlLbl val="0"/>
+      </c:catAx>
+      <c:valAx>
+        <c:axId val="-2113994440"/>
+        <c:scaling>
+          <c:min val="0.0"/>
+        </c:scaling>
+        <c:delete val="0"/>
+        <c:axPos val="l"/>
+        <c:majorGridlines>
+          <c:spPr>
+            <a:ln w="3175">
+              <a:solidFill>
+                <a:srgbClr val="E9ECEF"/>
+              </a:solidFill>
+            </a:ln>
+          </c:spPr>
+        </c:majorGridlines>
+        <c:numFmt formatCode="$#,##0" sourceLinked="0"/>
+        <c:majorTickMark val="out"/>
+        <c:minorTickMark val="none"/>
+        <c:tickLblPos val="nextTo"/>
+        <c:txPr>
+          <a:bodyPr/>
+          <a:lstStyle/>
+          <a:p>
+            <a:pPr>
+              <a:defRPr sz="1100">
+                <a:solidFill>
+                  <a:srgbClr val="6C757D"/>
+                </a:solidFill>
+                <a:latin typeface="Segoe UI"/>
+              </a:defRPr>
+            </a:pPr>
+          </a:p>
+        </c:txPr>
+        <c:crossAx val="-2068027336"/>
+        <c:crosses val="autoZero"/>
+      </c:valAx>
+    </c:plotArea>
+    <c:dispBlanksAs val="gap"/>
+  </c:chart>
+  <c:txPr>
+    <a:bodyPr/>
+    <a:lstStyle/>
+    <a:p>
+      <a:pPr>
+        <a:defRPr sz="1800"/>
+      </a:pPr>
+      <a:endParaRPr lang="en-US"/>
+    </a:p>
+  </c:txPr>
+  <c:externalData r:id="rId1">
+    <c:autoUpdate val="0"/>
+  </c:externalData>
+</c:chartSpace>
 </file>
 
 <file path=ppt/slideLayouts/slideLayout1.xml><?xml version="1.0" encoding="utf-8"?>
@@ -3112,7 +3234,7 @@
             <a:avLst/>
           </a:prstGeom>
           <a:solidFill>
-            <a:srgbClr val="4A148C"/>
+            <a:srgbClr val="F8F9FB"/>
           </a:solidFill>
           <a:ln>
             <a:solidFill>
@@ -3138,7 +3260,11 @@
           <a:bodyPr rtlCol="0" anchor="ctr"/>
           <a:lstStyle/>
           <a:p>
-            <a:pPr algn="ctr"/>
+            <a:pPr algn="ctr">
+              <a:defRPr>
+                <a:latin typeface="Segoe UI"/>
+              </a:defRPr>
+            </a:pPr>
           </a:p>
         </p:txBody>
       </p:sp>
@@ -3181,7 +3307,11 @@
           <a:bodyPr rtlCol="0" anchor="ctr"/>
           <a:lstStyle/>
           <a:p>
-            <a:pPr algn="ctr"/>
+            <a:pPr algn="ctr">
+              <a:defRPr>
+                <a:latin typeface="Segoe UI"/>
+              </a:defRPr>
+            </a:pPr>
           </a:p>
         </p:txBody>
       </p:sp>
@@ -3226,7 +3356,11 @@
           <a:bodyPr rtlCol="0" anchor="ctr"/>
           <a:lstStyle/>
           <a:p>
-            <a:pPr algn="ctr"/>
+            <a:pPr algn="ctr">
+              <a:defRPr>
+                <a:latin typeface="Segoe UI"/>
+              </a:defRPr>
+            </a:pPr>
           </a:p>
         </p:txBody>
       </p:sp>
@@ -3253,10 +3387,11 @@
           <a:lstStyle/>
           <a:p>
             <a:pPr algn="ctr">
-              <a:defRPr sz="3600" b="1">
-                <a:solidFill>
-                  <a:srgbClr val="4A148C"/>
-                </a:solidFill>
+              <a:defRPr sz="2800" b="1" u="sng">
+                <a:solidFill>
+                  <a:srgbClr val="004F9E"/>
+                </a:solidFill>
+                <a:latin typeface="Segoe UI"/>
               </a:defRPr>
             </a:pPr>
             <a:r>
@@ -3288,10 +3423,11 @@
           <a:lstStyle/>
           <a:p>
             <a:pPr algn="ctr">
-              <a:defRPr sz="5400" b="1">
-                <a:solidFill>
-                  <a:srgbClr val="FFFFFF"/>
-                </a:solidFill>
+              <a:defRPr sz="2800" b="1" u="sng">
+                <a:solidFill>
+                  <a:srgbClr val="004F9E"/>
+                </a:solidFill>
+                <a:latin typeface="Segoe UI"/>
               </a:defRPr>
             </a:pPr>
             <a:r>
@@ -3323,10 +3459,11 @@
           <a:lstStyle/>
           <a:p>
             <a:pPr algn="ctr">
-              <a:defRPr sz="2400">
-                <a:solidFill>
-                  <a:srgbClr val="CE93D8"/>
-                </a:solidFill>
+              <a:defRPr sz="2800" b="1" u="sng">
+                <a:solidFill>
+                  <a:srgbClr val="004F9E"/>
+                </a:solidFill>
+                <a:latin typeface="Segoe UI"/>
               </a:defRPr>
             </a:pPr>
             <a:r>
@@ -3360,8 +3497,9 @@
             <a:pPr algn="ctr">
               <a:defRPr sz="1800">
                 <a:solidFill>
-                  <a:srgbClr val="7F8C8D"/>
-                </a:solidFill>
+                  <a:srgbClr val="333333"/>
+                </a:solidFill>
+                <a:latin typeface="Segoe UI"/>
               </a:defRPr>
             </a:pPr>
             <a:r>
@@ -3395,8 +3533,9 @@
             <a:pPr algn="ctr">
               <a:defRPr sz="1400" i="1">
                 <a:solidFill>
-                  <a:srgbClr val="CE93D8"/>
-                </a:solidFill>
+                  <a:srgbClr val="333333"/>
+                </a:solidFill>
+                <a:latin typeface="Segoe UI"/>
               </a:defRPr>
             </a:pPr>
             <a:r>
@@ -3447,7 +3586,11 @@
           <a:bodyPr rtlCol="0" anchor="ctr"/>
           <a:lstStyle/>
           <a:p>
-            <a:pPr algn="ctr"/>
+            <a:pPr algn="ctr">
+              <a:defRPr>
+                <a:latin typeface="Segoe UI"/>
+              </a:defRPr>
+            </a:pPr>
           </a:p>
         </p:txBody>
       </p:sp>
@@ -3484,7 +3627,7 @@
             <a:avLst/>
           </a:prstGeom>
           <a:solidFill>
-            <a:srgbClr val="4A148C"/>
+            <a:srgbClr val="FFFFFF"/>
           </a:solidFill>
           <a:ln>
             <a:noFill/>
@@ -3508,20 +3651,77 @@
           <a:bodyPr rtlCol="0" anchor="ctr"/>
           <a:lstStyle/>
           <a:p>
-            <a:pPr algn="ctr"/>
-          </a:p>
-        </p:txBody>
-      </p:sp>
-      <p:sp>
-        <p:nvSpPr>
-          <p:cNvPr id="3" name="TextBox 2"/>
+            <a:pPr algn="ctr">
+              <a:defRPr b="1">
+                <a:solidFill>
+                  <a:srgbClr val="004F9E"/>
+                </a:solidFill>
+                <a:latin typeface="Segoe UI"/>
+              </a:defRPr>
+            </a:pPr>
+          </a:p>
+        </p:txBody>
+      </p:sp>
+      <p:sp>
+        <p:nvSpPr>
+          <p:cNvPr id="3" name="Rectangle 2"/>
+          <p:cNvSpPr/>
+          <p:nvPr/>
+        </p:nvSpPr>
+        <p:spPr>
+          <a:xfrm>
+            <a:off x="0" y="0"/>
+            <a:ext cx="9144000" cy="18288"/>
+          </a:xfrm>
+          <a:prstGeom prst="rect">
+            <a:avLst/>
+          </a:prstGeom>
+          <a:solidFill>
+            <a:srgbClr val="004F9E"/>
+          </a:solidFill>
+          <a:ln>
+            <a:noFill/>
+          </a:ln>
+        </p:spPr>
+        <p:style>
+          <a:lnRef idx="1">
+            <a:schemeClr val="accent1"/>
+          </a:lnRef>
+          <a:fillRef idx="3">
+            <a:schemeClr val="accent1"/>
+          </a:fillRef>
+          <a:effectRef idx="2">
+            <a:schemeClr val="accent1"/>
+          </a:effectRef>
+          <a:fontRef idx="minor">
+            <a:schemeClr val="lt1"/>
+          </a:fontRef>
+        </p:style>
+        <p:txBody>
+          <a:bodyPr rtlCol="0" anchor="ctr"/>
+          <a:lstStyle/>
+          <a:p>
+            <a:pPr algn="ctr">
+              <a:defRPr b="1">
+                <a:solidFill>
+                  <a:srgbClr val="004F9E"/>
+                </a:solidFill>
+                <a:latin typeface="Segoe UI"/>
+              </a:defRPr>
+            </a:pPr>
+          </a:p>
+        </p:txBody>
+      </p:sp>
+      <p:sp>
+        <p:nvSpPr>
+          <p:cNvPr id="4" name="TextBox 3"/>
           <p:cNvSpPr txBox="1"/>
           <p:nvPr/>
         </p:nvSpPr>
         <p:spPr>
           <a:xfrm>
-            <a:off x="914400" y="1828800"/>
-            <a:ext cx="7315200" cy="914400"/>
+            <a:off x="228600" y="457200"/>
+            <a:ext cx="8686800" cy="914400"/>
           </a:xfrm>
           <a:prstGeom prst="rect">
             <a:avLst/>
@@ -3535,10 +3735,11 @@
           <a:lstStyle/>
           <a:p>
             <a:pPr algn="ctr">
-              <a:defRPr sz="4400" b="1">
-                <a:solidFill>
-                  <a:srgbClr val="FFFFFF"/>
-                </a:solidFill>
+              <a:defRPr sz="2800" b="1" u="sng">
+                <a:solidFill>
+                  <a:srgbClr val="004F9E"/>
+                </a:solidFill>
+                <a:latin typeface="Segoe UI"/>
               </a:defRPr>
             </a:pPr>
             <a:r>
@@ -3549,35 +3750,46 @@
       </p:sp>
       <p:sp>
         <p:nvSpPr>
-          <p:cNvPr id="4" name="TextBox 3"/>
+          <p:cNvPr id="5" name="TextBox 4"/>
           <p:cNvSpPr txBox="1"/>
           <p:nvPr/>
         </p:nvSpPr>
         <p:spPr>
           <a:xfrm>
-            <a:off x="1371600" y="2926080"/>
-            <a:ext cx="6400800" cy="1371600"/>
+            <a:off x="1371600" y="2286000"/>
+            <a:ext cx="6400800" cy="2286000"/>
           </a:xfrm>
           <a:prstGeom prst="rect">
             <a:avLst/>
           </a:prstGeom>
           <a:noFill/>
+          <a:effectLst/>
         </p:spPr>
         <p:txBody>
           <a:bodyPr wrap="square">
             <a:spAutoFit/>
           </a:bodyPr>
           <a:lstStyle/>
-          <a:p/>
+          <a:p>
+            <a:pPr>
+              <a:defRPr b="1">
+                <a:solidFill>
+                  <a:srgbClr val="004F9E"/>
+                </a:solidFill>
+                <a:latin typeface="Segoe UI"/>
+              </a:defRPr>
+            </a:pPr>
+          </a:p>
           <a:p>
             <a:pPr algn="ctr">
               <a:spcAft>
-                <a:spcPts val="1200"/>
+                <a:spcPts val="1400"/>
               </a:spcAft>
-              <a:defRPr sz="1800">
-                <a:solidFill>
-                  <a:srgbClr val="CE93D8"/>
-                </a:solidFill>
+              <a:defRPr sz="2000">
+                <a:solidFill>
+                  <a:srgbClr val="16A085"/>
+                </a:solidFill>
+                <a:latin typeface="Segoe UI"/>
               </a:defRPr>
             </a:pPr>
             <a:r>
@@ -3587,12 +3799,13 @@
           <a:p>
             <a:pPr algn="ctr">
               <a:spcAft>
-                <a:spcPts val="1200"/>
+                <a:spcPts val="1400"/>
               </a:spcAft>
-              <a:defRPr sz="1800">
-                <a:solidFill>
-                  <a:srgbClr val="CE93D8"/>
-                </a:solidFill>
+              <a:defRPr sz="2000">
+                <a:solidFill>
+                  <a:srgbClr val="16A085"/>
+                </a:solidFill>
+                <a:latin typeface="Segoe UI"/>
               </a:defRPr>
             </a:pPr>
             <a:r>
@@ -3602,12 +3815,13 @@
           <a:p>
             <a:pPr algn="ctr">
               <a:spcAft>
-                <a:spcPts val="1200"/>
+                <a:spcPts val="1400"/>
               </a:spcAft>
-              <a:defRPr sz="1800">
-                <a:solidFill>
-                  <a:srgbClr val="CE93D8"/>
-                </a:solidFill>
+              <a:defRPr sz="2000">
+                <a:solidFill>
+                  <a:srgbClr val="16A085"/>
+                </a:solidFill>
+                <a:latin typeface="Segoe UI"/>
               </a:defRPr>
             </a:pPr>
             <a:r>
@@ -3618,14 +3832,14 @@
       </p:sp>
       <p:sp>
         <p:nvSpPr>
-          <p:cNvPr id="5" name="TextBox 4"/>
+          <p:cNvPr id="6" name="TextBox 5"/>
           <p:cNvSpPr txBox="1"/>
           <p:nvPr/>
         </p:nvSpPr>
         <p:spPr>
           <a:xfrm>
-            <a:off x="914400" y="4572000"/>
-            <a:ext cx="7315200" cy="457200"/>
+            <a:off x="228600" y="6515100"/>
+            <a:ext cx="8686800" cy="457200"/>
           </a:xfrm>
           <a:prstGeom prst="rect">
             <a:avLst/>
@@ -3639,14 +3853,15 @@
           <a:lstStyle/>
           <a:p>
             <a:pPr algn="ctr">
-              <a:defRPr sz="1400">
-                <a:solidFill>
-                  <a:srgbClr val="F3E5F5"/>
-                </a:solidFill>
-              </a:defRPr>
-            </a:pPr>
-            <a:r>
-              <a:t>Generated by FinDeck | November 08, 2025</a:t>
+              <a:defRPr sz="1400" b="1">
+                <a:solidFill>
+                  <a:srgbClr val="004F9E"/>
+                </a:solidFill>
+                <a:latin typeface="Segoe UI"/>
+              </a:defRPr>
+            </a:pPr>
+            <a:r>
+              <a:t>Generated by FinDeck | November 13, 2025</a:t>
             </a:r>
           </a:p>
         </p:txBody>
@@ -3692,10 +3907,11 @@
           <a:lstStyle/>
           <a:p>
             <a:pPr>
-              <a:defRPr sz="3600" b="1">
-                <a:solidFill>
-                  <a:srgbClr val="4A148C"/>
-                </a:solidFill>
+              <a:defRPr sz="2800" b="1" u="sng">
+                <a:solidFill>
+                  <a:srgbClr val="004F9E"/>
+                </a:solidFill>
+                <a:latin typeface="Segoe UI"/>
               </a:defRPr>
             </a:pPr>
             <a:r>
@@ -3719,7 +3935,7 @@
             <a:avLst/>
           </a:prstGeom>
           <a:solidFill>
-            <a:srgbClr val="7B1FA2"/>
+            <a:srgbClr val="FFFFFF"/>
           </a:solidFill>
           <a:ln>
             <a:noFill/>
@@ -3743,7 +3959,14 @@
           <a:bodyPr rtlCol="0" anchor="ctr"/>
           <a:lstStyle/>
           <a:p>
-            <a:pPr algn="ctr"/>
+            <a:pPr algn="ctr">
+              <a:defRPr b="1">
+                <a:solidFill>
+                  <a:srgbClr val="004F9E"/>
+                </a:solidFill>
+                <a:latin typeface="Segoe UI"/>
+              </a:defRPr>
+            </a:pPr>
           </a:p>
         </p:txBody>
       </p:sp>
@@ -3773,10 +3996,11 @@
               <a:spcAft>
                 <a:spcPts val="600"/>
               </a:spcAft>
-              <a:defRPr sz="1600">
-                <a:solidFill>
-                  <a:srgbClr val="34495E"/>
-                </a:solidFill>
+              <a:defRPr sz="1600" b="1">
+                <a:solidFill>
+                  <a:srgbClr val="004F9E"/>
+                </a:solidFill>
+                <a:latin typeface="Segoe UI"/>
               </a:defRPr>
             </a:pPr>
             <a:r>
@@ -3848,7 +4072,14 @@
           <a:bodyPr rtlCol="0" anchor="ctr"/>
           <a:lstStyle/>
           <a:p>
-            <a:pPr algn="ctr"/>
+            <a:pPr algn="ctr">
+              <a:defRPr b="1">
+                <a:solidFill>
+                  <a:srgbClr val="004F9E"/>
+                </a:solidFill>
+                <a:latin typeface="Segoe UI"/>
+              </a:defRPr>
+            </a:pPr>
           </a:p>
         </p:txBody>
       </p:sp>
@@ -3878,10 +4109,11 @@
               <a:spcAft>
                 <a:spcPts val="600"/>
               </a:spcAft>
-              <a:defRPr sz="1600">
-                <a:solidFill>
-                  <a:srgbClr val="34495E"/>
-                </a:solidFill>
+              <a:defRPr sz="1600" b="1">
+                <a:solidFill>
+                  <a:srgbClr val="004F9E"/>
+                </a:solidFill>
+                <a:latin typeface="Segoe UI"/>
               </a:defRPr>
             </a:pPr>
             <a:r>
@@ -3952,7 +4184,14 @@
           <a:bodyPr rtlCol="0" anchor="ctr"/>
           <a:lstStyle/>
           <a:p>
-            <a:pPr algn="ctr"/>
+            <a:pPr algn="ctr">
+              <a:defRPr b="1">
+                <a:solidFill>
+                  <a:srgbClr val="004F9E"/>
+                </a:solidFill>
+                <a:latin typeface="Segoe UI"/>
+              </a:defRPr>
+            </a:pPr>
           </a:p>
         </p:txBody>
       </p:sp>
@@ -3982,10 +4221,11 @@
               <a:spcAft>
                 <a:spcPts val="600"/>
               </a:spcAft>
-              <a:defRPr sz="1600">
-                <a:solidFill>
-                  <a:srgbClr val="34495E"/>
-                </a:solidFill>
+              <a:defRPr sz="1600" b="1">
+                <a:solidFill>
+                  <a:srgbClr val="004F9E"/>
+                </a:solidFill>
+                <a:latin typeface="Segoe UI"/>
               </a:defRPr>
             </a:pPr>
             <a:r>
@@ -4053,7 +4293,14 @@
           <a:bodyPr rtlCol="0" anchor="ctr"/>
           <a:lstStyle/>
           <a:p>
-            <a:pPr algn="ctr"/>
+            <a:pPr algn="ctr">
+              <a:defRPr b="1">
+                <a:solidFill>
+                  <a:srgbClr val="004F9E"/>
+                </a:solidFill>
+                <a:latin typeface="Segoe UI"/>
+              </a:defRPr>
+            </a:pPr>
           </a:p>
         </p:txBody>
       </p:sp>
@@ -4083,10 +4330,11 @@
               <a:spcAft>
                 <a:spcPts val="600"/>
               </a:spcAft>
-              <a:defRPr sz="1600">
-                <a:solidFill>
-                  <a:srgbClr val="34495E"/>
-                </a:solidFill>
+              <a:defRPr sz="1600" b="1">
+                <a:solidFill>
+                  <a:srgbClr val="004F9E"/>
+                </a:solidFill>
+                <a:latin typeface="Segoe UI"/>
               </a:defRPr>
             </a:pPr>
             <a:r>
@@ -4157,7 +4405,14 @@
           <a:bodyPr rtlCol="0" anchor="ctr"/>
           <a:lstStyle/>
           <a:p>
-            <a:pPr algn="ctr"/>
+            <a:pPr algn="ctr">
+              <a:defRPr b="1">
+                <a:solidFill>
+                  <a:srgbClr val="004F9E"/>
+                </a:solidFill>
+                <a:latin typeface="Segoe UI"/>
+              </a:defRPr>
+            </a:pPr>
           </a:p>
         </p:txBody>
       </p:sp>
@@ -4187,10 +4442,11 @@
               <a:spcAft>
                 <a:spcPts val="600"/>
               </a:spcAft>
-              <a:defRPr sz="1600">
-                <a:solidFill>
-                  <a:srgbClr val="34495E"/>
-                </a:solidFill>
+              <a:defRPr sz="1600" b="1">
+                <a:solidFill>
+                  <a:srgbClr val="004F9E"/>
+                </a:solidFill>
+                <a:latin typeface="Segoe UI"/>
               </a:defRPr>
             </a:pPr>
             <a:r>
@@ -4264,7 +4520,14 @@
           <a:bodyPr rtlCol="0" anchor="ctr"/>
           <a:lstStyle/>
           <a:p>
-            <a:pPr algn="ctr"/>
+            <a:pPr algn="ctr">
+              <a:defRPr b="1">
+                <a:solidFill>
+                  <a:srgbClr val="004F9E"/>
+                </a:solidFill>
+                <a:latin typeface="Segoe UI"/>
+              </a:defRPr>
+            </a:pPr>
           </a:p>
         </p:txBody>
       </p:sp>
@@ -4294,10 +4557,11 @@
               <a:spcAft>
                 <a:spcPts val="600"/>
               </a:spcAft>
-              <a:defRPr sz="1600">
-                <a:solidFill>
-                  <a:srgbClr val="34495E"/>
-                </a:solidFill>
+              <a:defRPr sz="1600" b="1">
+                <a:solidFill>
+                  <a:srgbClr val="004F9E"/>
+                </a:solidFill>
+                <a:latin typeface="Segoe UI"/>
               </a:defRPr>
             </a:pPr>
             <a:r>
@@ -4362,10 +4626,11 @@
           <a:lstStyle/>
           <a:p>
             <a:pPr>
-              <a:defRPr sz="3200" b="1">
-                <a:solidFill>
-                  <a:srgbClr val="4A148C"/>
-                </a:solidFill>
+              <a:defRPr sz="2800" b="1" u="sng">
+                <a:solidFill>
+                  <a:srgbClr val="004F9E"/>
+                </a:solidFill>
+                <a:latin typeface="Segoe UI"/>
               </a:defRPr>
             </a:pPr>
             <a:r>
@@ -4400,6 +4665,10 @@
               <a:spcBef>
                 <a:spcPts val="1200"/>
               </a:spcBef>
+              <a:defRPr>
+                <a:solidFill/>
+                <a:latin typeface="Segoe UI"/>
+              </a:defRPr>
             </a:pPr>
             <a:r>
               <a:rPr sz="1800" b="1">
@@ -4423,6 +4692,10 @@
               <a:spcBef>
                 <a:spcPts val="1200"/>
               </a:spcBef>
+              <a:defRPr>
+                <a:solidFill/>
+                <a:latin typeface="Segoe UI"/>
+              </a:defRPr>
             </a:pPr>
             <a:r>
               <a:rPr sz="1800" b="1">
@@ -4446,6 +4719,10 @@
               <a:spcBef>
                 <a:spcPts val="1200"/>
               </a:spcBef>
+              <a:defRPr>
+                <a:solidFill/>
+                <a:latin typeface="Segoe UI"/>
+              </a:defRPr>
             </a:pPr>
             <a:r>
               <a:rPr sz="1800" b="1">
@@ -4469,6 +4746,10 @@
               <a:spcBef>
                 <a:spcPts val="1200"/>
               </a:spcBef>
+              <a:defRPr>
+                <a:solidFill/>
+                <a:latin typeface="Segoe UI"/>
+              </a:defRPr>
             </a:pPr>
             <a:r>
               <a:rPr sz="1800" b="1">
@@ -4492,6 +4773,10 @@
               <a:spcBef>
                 <a:spcPts val="1200"/>
               </a:spcBef>
+              <a:defRPr>
+                <a:solidFill/>
+                <a:latin typeface="Segoe UI"/>
+              </a:defRPr>
             </a:pPr>
             <a:r>
               <a:rPr sz="1800" b="1">
@@ -4515,6 +4800,10 @@
               <a:spcBef>
                 <a:spcPts val="1200"/>
               </a:spcBef>
+              <a:defRPr>
+                <a:solidFill/>
+                <a:latin typeface="Segoe UI"/>
+              </a:defRPr>
             </a:pPr>
             <a:r>
               <a:rPr sz="1800" b="1">
@@ -4576,7 +4865,12 @@
           <a:bodyPr rtlCol="0" anchor="ctr" wrap="square" lIns="182880" rIns="182880" tIns="91440"/>
           <a:lstStyle/>
           <a:p>
-            <a:pPr algn="ctr"/>
+            <a:pPr algn="ctr">
+              <a:defRPr>
+                <a:solidFill/>
+                <a:latin typeface="Segoe UI"/>
+              </a:defRPr>
+            </a:pPr>
             <a:r>
               <a:rPr sz="1400" b="1">
                 <a:solidFill>
@@ -4637,10 +4931,11 @@
           <a:lstStyle/>
           <a:p>
             <a:pPr>
-              <a:defRPr sz="3600" b="1">
-                <a:solidFill>
-                  <a:srgbClr val="4A148C"/>
-                </a:solidFill>
+              <a:defRPr sz="2800" b="1" u="sng">
+                <a:solidFill>
+                  <a:srgbClr val="004F9E"/>
+                </a:solidFill>
+                <a:latin typeface="Segoe UI"/>
               </a:defRPr>
             </a:pPr>
             <a:r>
@@ -4658,7 +4953,7 @@
         <p:spPr>
           <a:xfrm>
             <a:off x="457200" y="1188720"/>
-            <a:ext cx="2560320" cy="1645920"/>
+            <a:ext cx="2286000" cy="1554480"/>
           </a:xfrm>
           <a:prstGeom prst="rect">
             <a:avLst/>
@@ -4690,7 +4985,11 @@
           <a:bodyPr rtlCol="0" anchor="ctr"/>
           <a:lstStyle/>
           <a:p>
-            <a:pPr algn="ctr"/>
+            <a:pPr algn="ctr">
+              <a:defRPr>
+                <a:latin typeface="Segoe UI"/>
+              </a:defRPr>
+            </a:pPr>
           </a:p>
         </p:txBody>
       </p:sp>
@@ -4703,7 +5002,7 @@
         <p:spPr>
           <a:xfrm>
             <a:off x="640080" y="1371600"/>
-            <a:ext cx="2194560" cy="365760"/>
+            <a:ext cx="1920240" cy="365760"/>
           </a:xfrm>
           <a:prstGeom prst="rect">
             <a:avLst/>
@@ -4717,10 +5016,11 @@
           <a:lstStyle/>
           <a:p>
             <a:pPr>
-              <a:defRPr sz="1400" b="1">
+              <a:defRPr sz="1300" b="1">
                 <a:solidFill>
                   <a:srgbClr val="34495E"/>
                 </a:solidFill>
+                <a:latin typeface="Segoe UI"/>
               </a:defRPr>
             </a:pPr>
             <a:r>
@@ -4738,7 +5038,7 @@
         <p:spPr>
           <a:xfrm>
             <a:off x="640080" y="1828800"/>
-            <a:ext cx="2194560" cy="548640"/>
+            <a:ext cx="1920240" cy="548640"/>
           </a:xfrm>
           <a:prstGeom prst="rect">
             <a:avLst/>
@@ -4752,10 +5052,11 @@
           <a:lstStyle/>
           <a:p>
             <a:pPr>
-              <a:defRPr sz="2800" b="1">
-                <a:solidFill>
-                  <a:srgbClr val="4A148C"/>
-                </a:solidFill>
+              <a:defRPr sz="2800" b="1" u="sng">
+                <a:solidFill>
+                  <a:srgbClr val="004F9E"/>
+                </a:solidFill>
+                <a:latin typeface="Segoe UI"/>
               </a:defRPr>
             </a:pPr>
             <a:r>
@@ -4772,8 +5073,8 @@
         </p:nvSpPr>
         <p:spPr>
           <a:xfrm>
-            <a:off x="640080" y="2468880"/>
-            <a:ext cx="2194560" cy="274320"/>
+            <a:off x="640080" y="2377440"/>
+            <a:ext cx="1920240" cy="274320"/>
           </a:xfrm>
           <a:prstGeom prst="rect">
             <a:avLst/>
@@ -4787,10 +5088,11 @@
           <a:lstStyle/>
           <a:p>
             <a:pPr>
-              <a:defRPr sz="1200">
-                <a:solidFill>
-                  <a:srgbClr val="7F8C8D"/>
-                </a:solidFill>
+              <a:defRPr sz="1100">
+                <a:solidFill>
+                  <a:srgbClr val="333333"/>
+                </a:solidFill>
+                <a:latin typeface="Segoe UI"/>
               </a:defRPr>
             </a:pPr>
             <a:r>
@@ -4807,8 +5109,8 @@
         </p:nvSpPr>
         <p:spPr>
           <a:xfrm>
-            <a:off x="3383280" y="1188720"/>
-            <a:ext cx="2560320" cy="1645920"/>
+            <a:off x="2926080" y="1188720"/>
+            <a:ext cx="2286000" cy="1554480"/>
           </a:xfrm>
           <a:prstGeom prst="rect">
             <a:avLst/>
@@ -4840,7 +5142,11 @@
           <a:bodyPr rtlCol="0" anchor="ctr"/>
           <a:lstStyle/>
           <a:p>
-            <a:pPr algn="ctr"/>
+            <a:pPr algn="ctr">
+              <a:defRPr>
+                <a:latin typeface="Segoe UI"/>
+              </a:defRPr>
+            </a:pPr>
           </a:p>
         </p:txBody>
       </p:sp>
@@ -4852,8 +5158,8 @@
         </p:nvSpPr>
         <p:spPr>
           <a:xfrm>
-            <a:off x="3566160" y="1371600"/>
-            <a:ext cx="2194560" cy="365760"/>
+            <a:off x="3108960" y="1371600"/>
+            <a:ext cx="1920240" cy="365760"/>
           </a:xfrm>
           <a:prstGeom prst="rect">
             <a:avLst/>
@@ -4867,10 +5173,11 @@
           <a:lstStyle/>
           <a:p>
             <a:pPr>
-              <a:defRPr sz="1400" b="1">
+              <a:defRPr sz="1300" b="1">
                 <a:solidFill>
                   <a:srgbClr val="34495E"/>
                 </a:solidFill>
+                <a:latin typeface="Segoe UI"/>
               </a:defRPr>
             </a:pPr>
             <a:r>
@@ -4887,8 +5194,8 @@
         </p:nvSpPr>
         <p:spPr>
           <a:xfrm>
-            <a:off x="3566160" y="1828800"/>
-            <a:ext cx="2194560" cy="548640"/>
+            <a:off x="3108960" y="1828800"/>
+            <a:ext cx="1920240" cy="548640"/>
           </a:xfrm>
           <a:prstGeom prst="rect">
             <a:avLst/>
@@ -4902,10 +5209,11 @@
           <a:lstStyle/>
           <a:p>
             <a:pPr>
-              <a:defRPr sz="2800" b="1">
-                <a:solidFill>
-                  <a:srgbClr val="4A148C"/>
-                </a:solidFill>
+              <a:defRPr sz="2800" b="1" u="sng">
+                <a:solidFill>
+                  <a:srgbClr val="004F9E"/>
+                </a:solidFill>
+                <a:latin typeface="Segoe UI"/>
               </a:defRPr>
             </a:pPr>
             <a:r>
@@ -4922,8 +5230,8 @@
         </p:nvSpPr>
         <p:spPr>
           <a:xfrm>
-            <a:off x="3566160" y="2468880"/>
-            <a:ext cx="2194560" cy="274320"/>
+            <a:off x="3108960" y="2377440"/>
+            <a:ext cx="1920240" cy="274320"/>
           </a:xfrm>
           <a:prstGeom prst="rect">
             <a:avLst/>
@@ -4937,10 +5245,11 @@
           <a:lstStyle/>
           <a:p>
             <a:pPr>
-              <a:defRPr sz="1200">
-                <a:solidFill>
-                  <a:srgbClr val="7F8C8D"/>
-                </a:solidFill>
+              <a:defRPr sz="1100">
+                <a:solidFill>
+                  <a:srgbClr val="333333"/>
+                </a:solidFill>
+                <a:latin typeface="Segoe UI"/>
               </a:defRPr>
             </a:pPr>
             <a:r>
@@ -4949,6 +5258,24 @@
           </a:p>
         </p:txBody>
       </p:sp>
+      <p:graphicFrame>
+        <p:nvGraphicFramePr>
+          <p:cNvPr id="11" name="Chart 10"/>
+          <p:cNvGraphicFramePr>
+            <a:graphicFrameLocks noGrp="1"/>
+          </p:cNvGraphicFramePr>
+          <p:nvPr/>
+        </p:nvGraphicFramePr>
+        <p:xfrm>
+          <a:off x="5486400" y="1188720"/>
+          <a:ext cx="3383280" cy="3383280"/>
+        </p:xfrm>
+        <a:graphic>
+          <a:graphicData uri="http://schemas.openxmlformats.org/drawingml/2006/chart">
+            <c:chart xmlns:c="http://schemas.openxmlformats.org/drawingml/2006/chart" r:id="rId2"/>
+          </a:graphicData>
+        </a:graphic>
+      </p:graphicFrame>
     </p:spTree>
   </p:cSld>
   <p:clrMapOvr>
@@ -4990,10 +5317,11 @@
           <a:lstStyle/>
           <a:p>
             <a:pPr>
-              <a:defRPr sz="3600" b="1">
-                <a:solidFill>
-                  <a:srgbClr val="4A148C"/>
-                </a:solidFill>
+              <a:defRPr sz="2800" b="1" u="sng">
+                <a:solidFill>
+                  <a:srgbClr val="004F9E"/>
+                </a:solidFill>
+                <a:latin typeface="Segoe UI"/>
               </a:defRPr>
             </a:pPr>
             <a:r>
@@ -5023,7 +5351,13 @@
             <a:spAutoFit/>
           </a:bodyPr>
           <a:lstStyle/>
-          <a:p/>
+          <a:p>
+            <a:pPr>
+              <a:defRPr>
+                <a:latin typeface="Segoe UI"/>
+              </a:defRPr>
+            </a:pPr>
+          </a:p>
           <a:p>
             <a:pPr>
               <a:spcAft>
@@ -5033,6 +5367,7 @@
                 <a:solidFill>
                   <a:srgbClr val="34495E"/>
                 </a:solidFill>
+                <a:latin typeface="Segoe UI"/>
               </a:defRPr>
             </a:pPr>
             <a:r>
@@ -5048,6 +5383,7 @@
                 <a:solidFill>
                   <a:srgbClr val="34495E"/>
                 </a:solidFill>
+                <a:latin typeface="Segoe UI"/>
               </a:defRPr>
             </a:pPr>
             <a:r>
@@ -5097,10 +5433,11 @@
           <a:lstStyle/>
           <a:p>
             <a:pPr>
-              <a:defRPr sz="3600" b="1">
-                <a:solidFill>
-                  <a:srgbClr val="4A148C"/>
-                </a:solidFill>
+              <a:defRPr sz="2800" b="1" u="sng">
+                <a:solidFill>
+                  <a:srgbClr val="004F9E"/>
+                </a:solidFill>
+                <a:latin typeface="Segoe UI"/>
               </a:defRPr>
             </a:pPr>
             <a:r>
@@ -5150,10 +5487,11 @@
           <a:lstStyle/>
           <a:p>
             <a:pPr>
-              <a:defRPr sz="3600" b="1">
-                <a:solidFill>
-                  <a:srgbClr val="4A148C"/>
-                </a:solidFill>
+              <a:defRPr sz="2800" b="1" u="sng">
+                <a:solidFill>
+                  <a:srgbClr val="004F9E"/>
+                </a:solidFill>
+                <a:latin typeface="Segoe UI"/>
               </a:defRPr>
             </a:pPr>
             <a:r>
@@ -5203,7 +5541,11 @@
           <a:bodyPr rtlCol="0" anchor="ctr"/>
           <a:lstStyle/>
           <a:p>
-            <a:pPr algn="ctr"/>
+            <a:pPr algn="ctr">
+              <a:defRPr>
+                <a:latin typeface="Segoe UI"/>
+              </a:defRPr>
+            </a:pPr>
           </a:p>
         </p:txBody>
       </p:sp>
@@ -5234,6 +5576,7 @@
                 <a:solidFill>
                   <a:srgbClr val="4A148C"/>
                 </a:solidFill>
+                <a:latin typeface="Segoe UI"/>
               </a:defRPr>
             </a:pPr>
             <a:r>
@@ -5269,6 +5612,7 @@
                 <a:solidFill>
                   <a:srgbClr val="34495E"/>
                 </a:solidFill>
+                <a:latin typeface="Segoe UI"/>
               </a:defRPr>
             </a:pPr>
             <a:r>
@@ -5318,10 +5662,11 @@
           <a:lstStyle/>
           <a:p>
             <a:pPr>
-              <a:defRPr sz="3600" b="1">
-                <a:solidFill>
-                  <a:srgbClr val="4A148C"/>
-                </a:solidFill>
+              <a:defRPr sz="2800" b="1" u="sng">
+                <a:solidFill>
+                  <a:srgbClr val="004F9E"/>
+                </a:solidFill>
+                <a:latin typeface="Segoe UI"/>
               </a:defRPr>
             </a:pPr>
             <a:r>
@@ -5371,10 +5716,11 @@
           <a:lstStyle/>
           <a:p>
             <a:pPr>
-              <a:defRPr sz="3600" b="1">
-                <a:solidFill>
-                  <a:srgbClr val="4A148C"/>
-                </a:solidFill>
+              <a:defRPr sz="2800" b="1" u="sng">
+                <a:solidFill>
+                  <a:srgbClr val="004F9E"/>
+                </a:solidFill>
+                <a:latin typeface="Segoe UI"/>
               </a:defRPr>
             </a:pPr>
             <a:r>
@@ -5404,7 +5750,13 @@
             <a:spAutoFit/>
           </a:bodyPr>
           <a:lstStyle/>
-          <a:p/>
+          <a:p>
+            <a:pPr>
+              <a:defRPr>
+                <a:latin typeface="Segoe UI"/>
+              </a:defRPr>
+            </a:pPr>
+          </a:p>
           <a:p>
             <a:pPr>
               <a:spcAft>
@@ -5414,6 +5766,7 @@
                 <a:solidFill>
                   <a:srgbClr val="34495E"/>
                 </a:solidFill>
+                <a:latin typeface="Segoe UI"/>
               </a:defRPr>
             </a:pPr>
             <a:r>
@@ -5429,6 +5782,7 @@
                 <a:solidFill>
                   <a:srgbClr val="34495E"/>
                 </a:solidFill>
+                <a:latin typeface="Segoe UI"/>
               </a:defRPr>
             </a:pPr>
             <a:r>
@@ -5444,6 +5798,7 @@
                 <a:solidFill>
                   <a:srgbClr val="34495E"/>
                 </a:solidFill>
+                <a:latin typeface="Segoe UI"/>
               </a:defRPr>
             </a:pPr>
             <a:r>
@@ -5459,6 +5814,7 @@
                 <a:solidFill>
                   <a:srgbClr val="34495E"/>
                 </a:solidFill>
+                <a:latin typeface="Segoe UI"/>
               </a:defRPr>
             </a:pPr>
             <a:r>
